--- a/templates/carousels/posts/2026-10-16-fri-did-you-know.pptx
+++ b/templates/carousels/posts/2026-10-16-fri-did-you-know.pptx
@@ -3827,7 +3827,7 @@
       <p:grpSpPr/>
       <p:pic>
         <p:nvPicPr>
-          <p:cNvPr id="2" name="Picture 1" descr="3200554339684813220.jpg"/>
+          <p:cNvPr id="2" name="Picture 1" descr="7832537369154778956.jpg"/>
           <p:cNvPicPr>
             <a:picLocks noChangeAspect="1"/>
           </p:cNvPicPr>
@@ -3858,7 +3858,7 @@
         <p:spPr>
           <a:xfrm>
             <a:off x="571500" y="6381750"/>
-            <a:ext cx="6667500" cy="381000"/>
+            <a:ext cx="9144000" cy="381000"/>
           </a:xfrm>
           <a:prstGeom prst="rect">
             <a:avLst/>
@@ -3873,7 +3873,7 @@
           <a:p>
             <a:pPr algn="l"/>
             <a:r>
-              <a:rPr sz="2100" b="1" i="0">
+              <a:rPr sz="3000" b="1" i="0">
                 <a:solidFill>
                   <a:srgbClr val="DBE6A7"/>
                 </a:solidFill>
@@ -3912,13 +3912,13 @@
               </a:lnSpc>
             </a:pPr>
             <a:r>
-              <a:rPr sz="3750" b="1" i="0">
+              <a:rPr sz="5700" b="1" i="0">
                 <a:solidFill>
                   <a:srgbClr val="FFFFFF"/>
                 </a:solidFill>
                 <a:latin typeface="Montserrat"/>
               </a:rPr>
-              <a:t>[COPY: Allison] One surprising fact, specific and nerdy. Name the organism or the molecule.</a:t>
+              <a:t>[COPY: Allison] One surprising fact. Name the organism.</a:t>
             </a:r>
           </a:p>
         </p:txBody>
@@ -3947,7 +3947,7 @@
           <a:p>
             <a:pPr algn="l"/>
             <a:r>
-              <a:rPr sz="2100" b="1" i="0">
+              <a:rPr sz="3000" b="1" i="0">
                 <a:solidFill>
                   <a:srgbClr val="DBE6A7"/>
                 </a:solidFill>
@@ -4228,7 +4228,7 @@
           <a:p>
             <a:pPr algn="l"/>
             <a:r>
-              <a:rPr sz="2100" b="1" i="0">
+              <a:rPr sz="3000" b="1" i="0">
                 <a:solidFill>
                   <a:srgbClr val="156826"/>
                 </a:solidFill>
@@ -4309,7 +4309,7 @@
           <a:p>
             <a:pPr algn="ctr"/>
             <a:r>
-              <a:rPr sz="2400" b="1" i="0">
+              <a:rPr sz="3000" b="1" i="0">
                 <a:solidFill>
                   <a:srgbClr val="6A665C"/>
                 </a:solidFill>
@@ -4321,7 +4321,7 @@
           <a:p>
             <a:pPr algn="ctr"/>
             <a:r>
-              <a:rPr sz="2400" b="1" i="0">
+              <a:rPr sz="3000" b="1" i="0">
                 <a:solidFill>
                   <a:srgbClr val="6A665C"/>
                 </a:solidFill>
@@ -4360,13 +4360,13 @@
               </a:lnSpc>
             </a:pPr>
             <a:r>
-              <a:rPr sz="4050" b="0" i="0">
+              <a:rPr sz="5700" b="0" i="0">
                 <a:solidFill>
                   <a:srgbClr val="22371F"/>
                 </a:solidFill>
                 <a:latin typeface="EB Garamond"/>
               </a:rPr>
-              <a:t>[COPY: Allison] First step of the mechanism, one line. Name the organism, enzyme or compound.</a:t>
+              <a:t>[COPY: Allison] Step one, one line.</a:t>
             </a:r>
           </a:p>
         </p:txBody>
@@ -4395,13 +4395,13 @@
           <a:p>
             <a:pPr algn="l"/>
             <a:r>
-              <a:rPr sz="1950" b="0" i="0">
+              <a:rPr sz="3000" b="0" i="0">
                 <a:solidFill>
                   <a:srgbClr val="6A665C"/>
                 </a:solidFill>
                 <a:latin typeface="Source Sans 3"/>
               </a:rPr>
-              <a:t>[COPY: Allison] Source line: who measured it, where, which year. No source, no number.</a:t>
+              <a:t>[COPY: Allison] Source: who, where, year.</a:t>
             </a:r>
           </a:p>
         </p:txBody>
@@ -4430,7 +4430,7 @@
           <a:p>
             <a:pPr algn="l"/>
             <a:r>
-              <a:rPr sz="2100" b="1" i="0">
+              <a:rPr sz="3000" b="1" i="0">
                 <a:solidFill>
                   <a:srgbClr val="6A665C"/>
                 </a:solidFill>
@@ -4711,7 +4711,7 @@
           <a:p>
             <a:pPr algn="l"/>
             <a:r>
-              <a:rPr sz="2100" b="1" i="0">
+              <a:rPr sz="3000" b="1" i="0">
                 <a:solidFill>
                   <a:srgbClr val="156826"/>
                 </a:solidFill>
@@ -4792,7 +4792,7 @@
           <a:p>
             <a:pPr algn="ctr"/>
             <a:r>
-              <a:rPr sz="2400" b="1" i="0">
+              <a:rPr sz="3000" b="1" i="0">
                 <a:solidFill>
                   <a:srgbClr val="6A665C"/>
                 </a:solidFill>
@@ -4804,7 +4804,7 @@
           <a:p>
             <a:pPr algn="ctr"/>
             <a:r>
-              <a:rPr sz="2400" b="1" i="0">
+              <a:rPr sz="3000" b="1" i="0">
                 <a:solidFill>
                   <a:srgbClr val="6A665C"/>
                 </a:solidFill>
@@ -4843,13 +4843,13 @@
               </a:lnSpc>
             </a:pPr>
             <a:r>
-              <a:rPr sz="4050" b="0" i="0">
+              <a:rPr sz="5700" b="0" i="0">
                 <a:solidFill>
                   <a:srgbClr val="22371F"/>
                 </a:solidFill>
                 <a:latin typeface="EB Garamond"/>
               </a:rPr>
-              <a:t>[COPY: Allison] Second step, one line. Chemical or microbial level: what moves, what is released.</a:t>
+              <a:t>[COPY: Allison] Step two, one line.</a:t>
             </a:r>
           </a:p>
         </p:txBody>
@@ -4878,13 +4878,13 @@
           <a:p>
             <a:pPr algn="l"/>
             <a:r>
-              <a:rPr sz="1950" b="0" i="0">
+              <a:rPr sz="3000" b="0" i="0">
                 <a:solidFill>
                   <a:srgbClr val="6A665C"/>
                 </a:solidFill>
                 <a:latin typeface="Source Sans 3"/>
               </a:rPr>
-              <a:t>[COPY: Allison] Source line: who measured it, where, which year. No source, no number.</a:t>
+              <a:t>[COPY: Allison] Source: who, where, year.</a:t>
             </a:r>
           </a:p>
         </p:txBody>
@@ -4913,7 +4913,7 @@
           <a:p>
             <a:pPr algn="l"/>
             <a:r>
-              <a:rPr sz="2100" b="1" i="0">
+              <a:rPr sz="3000" b="1" i="0">
                 <a:solidFill>
                   <a:srgbClr val="6A665C"/>
                 </a:solidFill>
@@ -5194,7 +5194,7 @@
           <a:p>
             <a:pPr algn="l"/>
             <a:r>
-              <a:rPr sz="2100" b="1" i="0">
+              <a:rPr sz="3000" b="1" i="0">
                 <a:solidFill>
                   <a:srgbClr val="156826"/>
                 </a:solidFill>
@@ -5275,7 +5275,7 @@
           <a:p>
             <a:pPr algn="ctr"/>
             <a:r>
-              <a:rPr sz="2400" b="1" i="0">
+              <a:rPr sz="3000" b="1" i="0">
                 <a:solidFill>
                   <a:srgbClr val="6A665C"/>
                 </a:solidFill>
@@ -5287,7 +5287,7 @@
           <a:p>
             <a:pPr algn="ctr"/>
             <a:r>
-              <a:rPr sz="2400" b="1" i="0">
+              <a:rPr sz="3000" b="1" i="0">
                 <a:solidFill>
                   <a:srgbClr val="6A665C"/>
                 </a:solidFill>
@@ -5326,13 +5326,13 @@
               </a:lnSpc>
             </a:pPr>
             <a:r>
-              <a:rPr sz="4050" b="0" i="0">
+              <a:rPr sz="5700" b="0" i="0">
                 <a:solidFill>
                   <a:srgbClr val="22371F"/>
                 </a:solidFill>
                 <a:latin typeface="EB Garamond"/>
               </a:rPr>
-              <a:t>[COPY: Allison] Third step, one line. Where it ends up: in the soil, in the root, in the plant.</a:t>
+              <a:t>[COPY: Allison] Step three, one line.</a:t>
             </a:r>
           </a:p>
         </p:txBody>
@@ -5361,13 +5361,13 @@
           <a:p>
             <a:pPr algn="l"/>
             <a:r>
-              <a:rPr sz="1950" b="0" i="0">
+              <a:rPr sz="3000" b="0" i="0">
                 <a:solidFill>
                   <a:srgbClr val="6A665C"/>
                 </a:solidFill>
                 <a:latin typeface="Source Sans 3"/>
               </a:rPr>
-              <a:t>[COPY: Allison] Source line: who measured it, where, which year. No source, no number.</a:t>
+              <a:t>[COPY: Allison] Source: who, where, year.</a:t>
             </a:r>
           </a:p>
         </p:txBody>
@@ -5396,7 +5396,7 @@
           <a:p>
             <a:pPr algn="l"/>
             <a:r>
-              <a:rPr sz="2100" b="1" i="0">
+              <a:rPr sz="3000" b="1" i="0">
                 <a:solidFill>
                   <a:srgbClr val="6A665C"/>
                 </a:solidFill>
@@ -5662,7 +5662,7 @@
         <p:spPr>
           <a:xfrm>
             <a:off x="571500" y="571500"/>
-            <a:ext cx="8572500" cy="381000"/>
+            <a:ext cx="9144000" cy="381000"/>
           </a:xfrm>
           <a:prstGeom prst="rect">
             <a:avLst/>
@@ -5677,7 +5677,7 @@
           <a:p>
             <a:pPr algn="l"/>
             <a:r>
-              <a:rPr sz="2250" b="1" i="0">
+              <a:rPr sz="3000" b="1" i="0">
                 <a:solidFill>
                   <a:srgbClr val="DBE6A7"/>
                 </a:solidFill>
@@ -5716,13 +5716,13 @@
               </a:lnSpc>
             </a:pPr>
             <a:r>
-              <a:rPr sz="5400" b="1" i="0">
+              <a:rPr sz="5700" b="1" i="0">
                 <a:solidFill>
                   <a:srgbClr val="FFFFFF"/>
                 </a:solidFill>
                 <a:latin typeface="Montserrat"/>
               </a:rPr>
-              <a:t>[COPY: Allison] One line. What the reader can now look for or do on their own ground.</a:t>
+              <a:t>[COPY: Allison] One line for their own soil.</a:t>
             </a:r>
           </a:p>
         </p:txBody>
@@ -5751,13 +5751,13 @@
           <a:p>
             <a:pPr algn="l"/>
             <a:r>
-              <a:rPr sz="2700" b="0" i="1">
+              <a:rPr sz="5700" b="0" i="1">
                 <a:solidFill>
                   <a:srgbClr val="DBE6A7"/>
                 </a:solidFill>
                 <a:latin typeface="EB Garamond"/>
               </a:rPr>
-              <a:t>[COPY: Allison] One call to action only, or none.</a:t>
+              <a:t>[COPY: Allison] One call to action, or none.</a:t>
             </a:r>
           </a:p>
         </p:txBody>
@@ -5786,7 +5786,7 @@
           <a:p>
             <a:pPr algn="l"/>
             <a:r>
-              <a:rPr sz="2100" b="1" i="0">
+              <a:rPr sz="3000" b="1" i="0">
                 <a:solidFill>
                   <a:srgbClr val="A7B097"/>
                 </a:solidFill>

--- a/templates/carousels/posts/2026-10-16-fri-did-you-know.pptx
+++ b/templates/carousels/posts/2026-10-16-fri-did-you-know.pptx
@@ -3827,7 +3827,7 @@
       <p:grpSpPr/>
       <p:pic>
         <p:nvPicPr>
-          <p:cNvPr id="2" name="Picture 1" descr="7832537369154778956.jpg"/>
+          <p:cNvPr id="2" name="Picture 1" descr="9099881624729588140.jpg"/>
           <p:cNvPicPr>
             <a:picLocks noChangeAspect="1"/>
           </p:cNvPicPr>
@@ -3923,9 +3923,33 @@
           </a:p>
         </p:txBody>
       </p:sp>
-      <p:sp>
-        <p:nvSpPr>
-          <p:cNvPr id="5" name="TextBox 4"/>
+      <p:pic>
+        <p:nvPicPr>
+          <p:cNvPr id="5" name="Picture 4" descr="st4703964084880291919.png"/>
+          <p:cNvPicPr>
+            <a:picLocks noChangeAspect="1"/>
+          </p:cNvPicPr>
+          <p:nvPr/>
+        </p:nvPicPr>
+        <p:blipFill>
+          <a:blip r:embed="rId4"/>
+          <a:stretch>
+            <a:fillRect/>
+          </a:stretch>
+        </p:blipFill>
+        <p:spPr>
+          <a:xfrm rot="480000">
+            <a:off x="6667500" y="4476750"/>
+            <a:ext cx="4038600" cy="3028950"/>
+          </a:xfrm>
+          <a:prstGeom prst="rect">
+            <a:avLst/>
+          </a:prstGeom>
+        </p:spPr>
+      </p:pic>
+      <p:sp>
+        <p:nvSpPr>
+          <p:cNvPr id="6" name="TextBox 5"/>
           <p:cNvSpPr txBox="1"/>
           <p:nvPr/>
         </p:nvSpPr>
@@ -3960,7 +3984,7 @@
       </p:sp>
       <p:sp>
         <p:nvSpPr>
-          <p:cNvPr id="6" name="Oval 5"/>
+          <p:cNvPr id="7" name="Oval 6"/>
           <p:cNvSpPr/>
           <p:nvPr/>
         </p:nvSpPr>
@@ -4004,7 +4028,7 @@
       </p:sp>
       <p:sp>
         <p:nvSpPr>
-          <p:cNvPr id="7" name="Oval 6"/>
+          <p:cNvPr id="8" name="Oval 7"/>
           <p:cNvSpPr/>
           <p:nvPr/>
         </p:nvSpPr>
@@ -4048,7 +4072,7 @@
       </p:sp>
       <p:sp>
         <p:nvSpPr>
-          <p:cNvPr id="8" name="Oval 7"/>
+          <p:cNvPr id="9" name="Oval 8"/>
           <p:cNvSpPr/>
           <p:nvPr/>
         </p:nvSpPr>
@@ -4092,7 +4116,7 @@
       </p:sp>
       <p:sp>
         <p:nvSpPr>
-          <p:cNvPr id="9" name="Oval 8"/>
+          <p:cNvPr id="10" name="Oval 9"/>
           <p:cNvSpPr/>
           <p:nvPr/>
         </p:nvSpPr>
@@ -4136,7 +4160,7 @@
       </p:sp>
       <p:sp>
         <p:nvSpPr>
-          <p:cNvPr id="10" name="Oval 9"/>
+          <p:cNvPr id="11" name="Oval 10"/>
           <p:cNvSpPr/>
           <p:nvPr/>
         </p:nvSpPr>
@@ -4406,9 +4430,33 @@
           </a:p>
         </p:txBody>
       </p:sp>
-      <p:sp>
-        <p:nvSpPr>
-          <p:cNvPr id="7" name="TextBox 6"/>
+      <p:pic>
+        <p:nvPicPr>
+          <p:cNvPr id="7" name="Picture 6" descr="st2398059889886313316.png"/>
+          <p:cNvPicPr>
+            <a:picLocks noChangeAspect="1"/>
+          </p:cNvPicPr>
+          <p:nvPr/>
+        </p:nvPicPr>
+        <p:blipFill>
+          <a:blip r:embed="rId3"/>
+          <a:stretch>
+            <a:fillRect/>
+          </a:stretch>
+        </p:blipFill>
+        <p:spPr>
+          <a:xfrm rot="21240000">
+            <a:off x="6572250" y="5334000"/>
+            <a:ext cx="3943350" cy="2962275"/>
+          </a:xfrm>
+          <a:prstGeom prst="rect">
+            <a:avLst/>
+          </a:prstGeom>
+        </p:spPr>
+      </p:pic>
+      <p:sp>
+        <p:nvSpPr>
+          <p:cNvPr id="8" name="TextBox 7"/>
           <p:cNvSpPr txBox="1"/>
           <p:nvPr/>
         </p:nvSpPr>
@@ -4443,7 +4491,7 @@
       </p:sp>
       <p:sp>
         <p:nvSpPr>
-          <p:cNvPr id="8" name="Oval 7"/>
+          <p:cNvPr id="9" name="Oval 8"/>
           <p:cNvSpPr/>
           <p:nvPr/>
         </p:nvSpPr>
@@ -4487,7 +4535,7 @@
       </p:sp>
       <p:sp>
         <p:nvSpPr>
-          <p:cNvPr id="9" name="Oval 8"/>
+          <p:cNvPr id="10" name="Oval 9"/>
           <p:cNvSpPr/>
           <p:nvPr/>
         </p:nvSpPr>
@@ -4531,7 +4579,7 @@
       </p:sp>
       <p:sp>
         <p:nvSpPr>
-          <p:cNvPr id="10" name="Oval 9"/>
+          <p:cNvPr id="11" name="Oval 10"/>
           <p:cNvSpPr/>
           <p:nvPr/>
         </p:nvSpPr>
@@ -4575,7 +4623,7 @@
       </p:sp>
       <p:sp>
         <p:nvSpPr>
-          <p:cNvPr id="11" name="Oval 10"/>
+          <p:cNvPr id="12" name="Oval 11"/>
           <p:cNvSpPr/>
           <p:nvPr/>
         </p:nvSpPr>
@@ -4619,7 +4667,7 @@
       </p:sp>
       <p:sp>
         <p:nvSpPr>
-          <p:cNvPr id="12" name="Oval 11"/>
+          <p:cNvPr id="13" name="Oval 12"/>
           <p:cNvSpPr/>
           <p:nvPr/>
         </p:nvSpPr>
@@ -4889,9 +4937,33 @@
           </a:p>
         </p:txBody>
       </p:sp>
-      <p:sp>
-        <p:nvSpPr>
-          <p:cNvPr id="7" name="TextBox 6"/>
+      <p:pic>
+        <p:nvPicPr>
+          <p:cNvPr id="7" name="Picture 6" descr="st7229242836553501809.png"/>
+          <p:cNvPicPr>
+            <a:picLocks noChangeAspect="1"/>
+          </p:cNvPicPr>
+          <p:nvPr/>
+        </p:nvPicPr>
+        <p:blipFill>
+          <a:blip r:embed="rId3"/>
+          <a:stretch>
+            <a:fillRect/>
+          </a:stretch>
+        </p:blipFill>
+        <p:spPr>
+          <a:xfrm rot="420000">
+            <a:off x="6572250" y="5334000"/>
+            <a:ext cx="3943350" cy="2962275"/>
+          </a:xfrm>
+          <a:prstGeom prst="rect">
+            <a:avLst/>
+          </a:prstGeom>
+        </p:spPr>
+      </p:pic>
+      <p:sp>
+        <p:nvSpPr>
+          <p:cNvPr id="8" name="TextBox 7"/>
           <p:cNvSpPr txBox="1"/>
           <p:nvPr/>
         </p:nvSpPr>
@@ -4926,7 +4998,7 @@
       </p:sp>
       <p:sp>
         <p:nvSpPr>
-          <p:cNvPr id="8" name="Oval 7"/>
+          <p:cNvPr id="9" name="Oval 8"/>
           <p:cNvSpPr/>
           <p:nvPr/>
         </p:nvSpPr>
@@ -4970,7 +5042,7 @@
       </p:sp>
       <p:sp>
         <p:nvSpPr>
-          <p:cNvPr id="9" name="Oval 8"/>
+          <p:cNvPr id="10" name="Oval 9"/>
           <p:cNvSpPr/>
           <p:nvPr/>
         </p:nvSpPr>
@@ -5014,7 +5086,7 @@
       </p:sp>
       <p:sp>
         <p:nvSpPr>
-          <p:cNvPr id="10" name="Oval 9"/>
+          <p:cNvPr id="11" name="Oval 10"/>
           <p:cNvSpPr/>
           <p:nvPr/>
         </p:nvSpPr>
@@ -5058,7 +5130,7 @@
       </p:sp>
       <p:sp>
         <p:nvSpPr>
-          <p:cNvPr id="11" name="Oval 10"/>
+          <p:cNvPr id="12" name="Oval 11"/>
           <p:cNvSpPr/>
           <p:nvPr/>
         </p:nvSpPr>
@@ -5102,7 +5174,7 @@
       </p:sp>
       <p:sp>
         <p:nvSpPr>
-          <p:cNvPr id="12" name="Oval 11"/>
+          <p:cNvPr id="13" name="Oval 12"/>
           <p:cNvSpPr/>
           <p:nvPr/>
         </p:nvSpPr>
@@ -5372,9 +5444,33 @@
           </a:p>
         </p:txBody>
       </p:sp>
-      <p:sp>
-        <p:nvSpPr>
-          <p:cNvPr id="7" name="TextBox 6"/>
+      <p:pic>
+        <p:nvPicPr>
+          <p:cNvPr id="7" name="Picture 6" descr="st3911960079040886591.png"/>
+          <p:cNvPicPr>
+            <a:picLocks noChangeAspect="1"/>
+          </p:cNvPicPr>
+          <p:nvPr/>
+        </p:nvPicPr>
+        <p:blipFill>
+          <a:blip r:embed="rId3"/>
+          <a:stretch>
+            <a:fillRect/>
+          </a:stretch>
+        </p:blipFill>
+        <p:spPr>
+          <a:xfrm rot="21120000">
+            <a:off x="6572250" y="5334000"/>
+            <a:ext cx="3943350" cy="2962275"/>
+          </a:xfrm>
+          <a:prstGeom prst="rect">
+            <a:avLst/>
+          </a:prstGeom>
+        </p:spPr>
+      </p:pic>
+      <p:sp>
+        <p:nvSpPr>
+          <p:cNvPr id="8" name="TextBox 7"/>
           <p:cNvSpPr txBox="1"/>
           <p:nvPr/>
         </p:nvSpPr>
@@ -5409,7 +5505,7 @@
       </p:sp>
       <p:sp>
         <p:nvSpPr>
-          <p:cNvPr id="8" name="Oval 7"/>
+          <p:cNvPr id="9" name="Oval 8"/>
           <p:cNvSpPr/>
           <p:nvPr/>
         </p:nvSpPr>
@@ -5453,7 +5549,7 @@
       </p:sp>
       <p:sp>
         <p:nvSpPr>
-          <p:cNvPr id="9" name="Oval 8"/>
+          <p:cNvPr id="10" name="Oval 9"/>
           <p:cNvSpPr/>
           <p:nvPr/>
         </p:nvSpPr>
@@ -5497,7 +5593,7 @@
       </p:sp>
       <p:sp>
         <p:nvSpPr>
-          <p:cNvPr id="10" name="Oval 9"/>
+          <p:cNvPr id="11" name="Oval 10"/>
           <p:cNvSpPr/>
           <p:nvPr/>
         </p:nvSpPr>
@@ -5541,7 +5637,7 @@
       </p:sp>
       <p:sp>
         <p:nvSpPr>
-          <p:cNvPr id="11" name="Oval 10"/>
+          <p:cNvPr id="12" name="Oval 11"/>
           <p:cNvSpPr/>
           <p:nvPr/>
         </p:nvSpPr>
@@ -5585,7 +5681,7 @@
       </p:sp>
       <p:sp>
         <p:nvSpPr>
-          <p:cNvPr id="12" name="Oval 11"/>
+          <p:cNvPr id="13" name="Oval 12"/>
           <p:cNvSpPr/>
           <p:nvPr/>
         </p:nvSpPr>
@@ -5762,9 +5858,33 @@
           </a:p>
         </p:txBody>
       </p:sp>
-      <p:sp>
-        <p:nvSpPr>
-          <p:cNvPr id="5" name="TextBox 4"/>
+      <p:pic>
+        <p:nvPicPr>
+          <p:cNvPr id="5" name="Picture 4" descr="st7242593602918937377.png"/>
+          <p:cNvPicPr>
+            <a:picLocks noChangeAspect="1"/>
+          </p:cNvPicPr>
+          <p:nvPr/>
+        </p:nvPicPr>
+        <p:blipFill>
+          <a:blip r:embed="rId3"/>
+          <a:stretch>
+            <a:fillRect/>
+          </a:stretch>
+        </p:blipFill>
+        <p:spPr>
+          <a:xfrm rot="21240000">
+            <a:off x="5715000" y="8382000"/>
+            <a:ext cx="4800600" cy="3552825"/>
+          </a:xfrm>
+          <a:prstGeom prst="rect">
+            <a:avLst/>
+          </a:prstGeom>
+        </p:spPr>
+      </p:pic>
+      <p:sp>
+        <p:nvSpPr>
+          <p:cNvPr id="6" name="TextBox 5"/>
           <p:cNvSpPr txBox="1"/>
           <p:nvPr/>
         </p:nvSpPr>
@@ -5799,7 +5919,7 @@
       </p:sp>
       <p:sp>
         <p:nvSpPr>
-          <p:cNvPr id="6" name="Oval 5"/>
+          <p:cNvPr id="7" name="Oval 6"/>
           <p:cNvSpPr/>
           <p:nvPr/>
         </p:nvSpPr>
@@ -5843,7 +5963,7 @@
       </p:sp>
       <p:sp>
         <p:nvSpPr>
-          <p:cNvPr id="7" name="Oval 6"/>
+          <p:cNvPr id="8" name="Oval 7"/>
           <p:cNvSpPr/>
           <p:nvPr/>
         </p:nvSpPr>
@@ -5887,7 +6007,7 @@
       </p:sp>
       <p:sp>
         <p:nvSpPr>
-          <p:cNvPr id="8" name="Oval 7"/>
+          <p:cNvPr id="9" name="Oval 8"/>
           <p:cNvSpPr/>
           <p:nvPr/>
         </p:nvSpPr>
@@ -5931,7 +6051,7 @@
       </p:sp>
       <p:sp>
         <p:nvSpPr>
-          <p:cNvPr id="9" name="Oval 8"/>
+          <p:cNvPr id="10" name="Oval 9"/>
           <p:cNvSpPr/>
           <p:nvPr/>
         </p:nvSpPr>
@@ -5975,7 +6095,7 @@
       </p:sp>
       <p:sp>
         <p:nvSpPr>
-          <p:cNvPr id="10" name="Oval 9"/>
+          <p:cNvPr id="11" name="Oval 10"/>
           <p:cNvSpPr/>
           <p:nvPr/>
         </p:nvSpPr>
